--- a/отчет.pptx
+++ b/отчет.pptx
@@ -17,15 +17,18 @@
     <p:sldId id="264" r:id="rId11"/>
     <p:sldId id="265" r:id="rId12"/>
     <p:sldId id="266" r:id="rId13"/>
-    <p:sldId id="269" r:id="rId14"/>
-    <p:sldId id="267" r:id="rId15"/>
-    <p:sldId id="268" r:id="rId16"/>
-    <p:sldId id="271" r:id="rId17"/>
-    <p:sldId id="270" r:id="rId18"/>
-    <p:sldId id="273" r:id="rId19"/>
-    <p:sldId id="274" r:id="rId20"/>
-    <p:sldId id="275" r:id="rId21"/>
-    <p:sldId id="276" r:id="rId22"/>
+    <p:sldId id="278" r:id="rId14"/>
+    <p:sldId id="269" r:id="rId15"/>
+    <p:sldId id="267" r:id="rId16"/>
+    <p:sldId id="268" r:id="rId17"/>
+    <p:sldId id="271" r:id="rId18"/>
+    <p:sldId id="270" r:id="rId19"/>
+    <p:sldId id="273" r:id="rId20"/>
+    <p:sldId id="279" r:id="rId21"/>
+    <p:sldId id="274" r:id="rId22"/>
+    <p:sldId id="275" r:id="rId23"/>
+    <p:sldId id="276" r:id="rId24"/>
+    <p:sldId id="277" r:id="rId25"/>
   </p:sldIdLst>
   <p:sldSz cx="12192000" cy="6858000"/>
   <p:notesSz cx="6858000" cy="9144000"/>
@@ -295,7 +298,7 @@
           <a:p>
             <a:fld id="{B1C38626-89C8-3A42-A51E-E7D92ACE4F5F}" type="datetimeFigureOut">
               <a:rPr lang="ru-RU" smtClean="0"/>
-              <a:t>16.12.2025</a:t>
+              <a:t>22.12.2025</a:t>
             </a:fld>
             <a:endParaRPr lang="ru-RU"/>
           </a:p>
@@ -465,7 +468,7 @@
           <a:p>
             <a:fld id="{B1C38626-89C8-3A42-A51E-E7D92ACE4F5F}" type="datetimeFigureOut">
               <a:rPr lang="ru-RU" smtClean="0"/>
-              <a:t>16.12.2025</a:t>
+              <a:t>22.12.2025</a:t>
             </a:fld>
             <a:endParaRPr lang="ru-RU"/>
           </a:p>
@@ -645,7 +648,7 @@
           <a:p>
             <a:fld id="{B1C38626-89C8-3A42-A51E-E7D92ACE4F5F}" type="datetimeFigureOut">
               <a:rPr lang="ru-RU" smtClean="0"/>
-              <a:t>16.12.2025</a:t>
+              <a:t>22.12.2025</a:t>
             </a:fld>
             <a:endParaRPr lang="ru-RU"/>
           </a:p>
@@ -815,7 +818,7 @@
           <a:p>
             <a:fld id="{B1C38626-89C8-3A42-A51E-E7D92ACE4F5F}" type="datetimeFigureOut">
               <a:rPr lang="ru-RU" smtClean="0"/>
-              <a:t>16.12.2025</a:t>
+              <a:t>22.12.2025</a:t>
             </a:fld>
             <a:endParaRPr lang="ru-RU"/>
           </a:p>
@@ -1083,7 +1086,7 @@
           <a:p>
             <a:fld id="{B1C38626-89C8-3A42-A51E-E7D92ACE4F5F}" type="datetimeFigureOut">
               <a:rPr lang="ru-RU" smtClean="0"/>
-              <a:t>16.12.2025</a:t>
+              <a:t>22.12.2025</a:t>
             </a:fld>
             <a:endParaRPr lang="ru-RU"/>
           </a:p>
@@ -1315,7 +1318,7 @@
           <a:p>
             <a:fld id="{B1C38626-89C8-3A42-A51E-E7D92ACE4F5F}" type="datetimeFigureOut">
               <a:rPr lang="ru-RU" smtClean="0"/>
-              <a:t>16.12.2025</a:t>
+              <a:t>22.12.2025</a:t>
             </a:fld>
             <a:endParaRPr lang="ru-RU"/>
           </a:p>
@@ -1674,7 +1677,7 @@
           <a:p>
             <a:fld id="{B1C38626-89C8-3A42-A51E-E7D92ACE4F5F}" type="datetimeFigureOut">
               <a:rPr lang="ru-RU" smtClean="0"/>
-              <a:t>16.12.2025</a:t>
+              <a:t>22.12.2025</a:t>
             </a:fld>
             <a:endParaRPr lang="ru-RU"/>
           </a:p>
@@ -1815,7 +1818,7 @@
           <a:p>
             <a:fld id="{B1C38626-89C8-3A42-A51E-E7D92ACE4F5F}" type="datetimeFigureOut">
               <a:rPr lang="ru-RU" smtClean="0"/>
-              <a:t>16.12.2025</a:t>
+              <a:t>22.12.2025</a:t>
             </a:fld>
             <a:endParaRPr lang="ru-RU"/>
           </a:p>
@@ -1910,7 +1913,7 @@
           <a:p>
             <a:fld id="{B1C38626-89C8-3A42-A51E-E7D92ACE4F5F}" type="datetimeFigureOut">
               <a:rPr lang="ru-RU" smtClean="0"/>
-              <a:t>16.12.2025</a:t>
+              <a:t>22.12.2025</a:t>
             </a:fld>
             <a:endParaRPr lang="ru-RU"/>
           </a:p>
@@ -2267,7 +2270,7 @@
           <a:p>
             <a:fld id="{B1C38626-89C8-3A42-A51E-E7D92ACE4F5F}" type="datetimeFigureOut">
               <a:rPr lang="ru-RU" smtClean="0"/>
-              <a:t>16.12.2025</a:t>
+              <a:t>22.12.2025</a:t>
             </a:fld>
             <a:endParaRPr lang="ru-RU"/>
           </a:p>
@@ -2624,7 +2627,7 @@
           <a:p>
             <a:fld id="{B1C38626-89C8-3A42-A51E-E7D92ACE4F5F}" type="datetimeFigureOut">
               <a:rPr lang="ru-RU" smtClean="0"/>
-              <a:t>16.12.2025</a:t>
+              <a:t>22.12.2025</a:t>
             </a:fld>
             <a:endParaRPr lang="ru-RU"/>
           </a:p>
@@ -2866,7 +2869,7 @@
           <a:p>
             <a:fld id="{B1C38626-89C8-3A42-A51E-E7D92ACE4F5F}" type="datetimeFigureOut">
               <a:rPr lang="ru-RU" smtClean="0"/>
-              <a:t>16.12.2025</a:t>
+              <a:t>22.12.2025</a:t>
             </a:fld>
             <a:endParaRPr lang="ru-RU"/>
           </a:p>
@@ -4180,6 +4183,109 @@
           <p:cNvPr id="2" name="Заголовок 1">
             <a:extLst>
               <a:ext uri="{FF2B5EF4-FFF2-40B4-BE49-F238E27FC236}">
+                <a16:creationId xmlns:a16="http://schemas.microsoft.com/office/drawing/2014/main" id="{94043EAF-29C7-9D47-ACE5-F2EF590AFB7F}"/>
+              </a:ext>
+            </a:extLst>
+          </p:cNvPr>
+          <p:cNvSpPr>
+            <a:spLocks noGrp="1"/>
+          </p:cNvSpPr>
+          <p:nvPr>
+            <p:ph type="title"/>
+          </p:nvPr>
+        </p:nvSpPr>
+        <p:spPr/>
+        <p:txBody>
+          <a:bodyPr/>
+          <a:lstStyle/>
+          <a:p>
+            <a:r>
+              <a:rPr lang="ru-RU" dirty="0"/>
+              <a:t>Нахождение максимального </a:t>
+            </a:r>
+            <a:r>
+              <a:rPr lang="en" dirty="0"/>
+              <a:t>N </a:t>
+            </a:r>
+            <a:r>
+              <a:rPr lang="ru-RU" dirty="0"/>
+              <a:t>при Хар</a:t>
+            </a:r>
+            <a:r>
+              <a:rPr lang="ru-RU" sz="2400" dirty="0">
+                <a:latin typeface="Arial" panose="020B0604020202020204" pitchFamily="34" charset="0"/>
+                <a:cs typeface="Arial" panose="020B0604020202020204" pitchFamily="34" charset="0"/>
+              </a:rPr>
+              <a:t>4 ≤ 0.5</a:t>
+            </a:r>
+            <a:endParaRPr lang="ru-RU" dirty="0"/>
+          </a:p>
+        </p:txBody>
+      </p:sp>
+      <p:pic>
+        <p:nvPicPr>
+          <p:cNvPr id="5" name="Объект 4">
+            <a:extLst>
+              <a:ext uri="{FF2B5EF4-FFF2-40B4-BE49-F238E27FC236}">
+                <a16:creationId xmlns:a16="http://schemas.microsoft.com/office/drawing/2014/main" id="{E80D5918-EDDC-7849-BC19-E06C914376CE}"/>
+              </a:ext>
+            </a:extLst>
+          </p:cNvPr>
+          <p:cNvPicPr>
+            <a:picLocks noGrp="1" noChangeAspect="1"/>
+          </p:cNvPicPr>
+          <p:nvPr>
+            <p:ph idx="1"/>
+          </p:nvPr>
+        </p:nvPicPr>
+        <p:blipFill>
+          <a:blip r:embed="rId2"/>
+          <a:stretch>
+            <a:fillRect/>
+          </a:stretch>
+        </p:blipFill>
+        <p:spPr>
+          <a:xfrm>
+            <a:off x="3098159" y="2230622"/>
+            <a:ext cx="5995681" cy="4115954"/>
+          </a:xfrm>
+        </p:spPr>
+      </p:pic>
+    </p:spTree>
+    <p:extLst>
+      <p:ext uri="{BB962C8B-B14F-4D97-AF65-F5344CB8AC3E}">
+        <p14:creationId xmlns:p14="http://schemas.microsoft.com/office/powerpoint/2010/main" val="764711534"/>
+      </p:ext>
+    </p:extLst>
+  </p:cSld>
+  <p:clrMapOvr>
+    <a:masterClrMapping/>
+  </p:clrMapOvr>
+</p:sld>
+</file>
+
+<file path=ppt/slides/slide14.xml><?xml version="1.0" encoding="utf-8"?>
+<p:sld xmlns:a="http://schemas.openxmlformats.org/drawingml/2006/main" xmlns:r="http://schemas.openxmlformats.org/officeDocument/2006/relationships" xmlns:p="http://schemas.openxmlformats.org/presentationml/2006/main">
+  <p:cSld>
+    <p:spTree>
+      <p:nvGrpSpPr>
+        <p:cNvPr id="1" name=""/>
+        <p:cNvGrpSpPr/>
+        <p:nvPr/>
+      </p:nvGrpSpPr>
+      <p:grpSpPr>
+        <a:xfrm>
+          <a:off x="0" y="0"/>
+          <a:ext cx="0" cy="0"/>
+          <a:chOff x="0" y="0"/>
+          <a:chExt cx="0" cy="0"/>
+        </a:xfrm>
+      </p:grpSpPr>
+      <p:sp>
+        <p:nvSpPr>
+          <p:cNvPr id="2" name="Заголовок 1">
+            <a:extLst>
+              <a:ext uri="{FF2B5EF4-FFF2-40B4-BE49-F238E27FC236}">
                 <a16:creationId xmlns:a16="http://schemas.microsoft.com/office/drawing/2014/main" id="{1A80844B-8862-D249-AE64-B5FDD780F8CC}"/>
               </a:ext>
             </a:extLst>
@@ -4455,267 +4561,6 @@
 </p:sld>
 </file>
 
-<file path=ppt/slides/slide14.xml><?xml version="1.0" encoding="utf-8"?>
-<p:sld xmlns:a="http://schemas.openxmlformats.org/drawingml/2006/main" xmlns:r="http://schemas.openxmlformats.org/officeDocument/2006/relationships" xmlns:p="http://schemas.openxmlformats.org/presentationml/2006/main">
-  <p:cSld>
-    <p:spTree>
-      <p:nvGrpSpPr>
-        <p:cNvPr id="1" name=""/>
-        <p:cNvGrpSpPr/>
-        <p:nvPr/>
-      </p:nvGrpSpPr>
-      <p:grpSpPr>
-        <a:xfrm>
-          <a:off x="0" y="0"/>
-          <a:ext cx="0" cy="0"/>
-          <a:chOff x="0" y="0"/>
-          <a:chExt cx="0" cy="0"/>
-        </a:xfrm>
-      </p:grpSpPr>
-      <p:sp>
-        <p:nvSpPr>
-          <p:cNvPr id="2" name="Заголовок 1">
-            <a:extLst>
-              <a:ext uri="{FF2B5EF4-FFF2-40B4-BE49-F238E27FC236}">
-                <a16:creationId xmlns:a16="http://schemas.microsoft.com/office/drawing/2014/main" id="{1A80844B-8862-D249-AE64-B5FDD780F8CC}"/>
-              </a:ext>
-            </a:extLst>
-          </p:cNvPr>
-          <p:cNvSpPr>
-            <a:spLocks noGrp="1"/>
-          </p:cNvSpPr>
-          <p:nvPr>
-            <p:ph type="title"/>
-          </p:nvPr>
-        </p:nvSpPr>
-        <p:spPr/>
-        <p:txBody>
-          <a:bodyPr/>
-          <a:lstStyle/>
-          <a:p>
-            <a:r>
-              <a:rPr lang="ru-RU" dirty="0"/>
-              <a:t>Нахождение максимального </a:t>
-            </a:r>
-            <a:r>
-              <a:rPr lang="en" dirty="0"/>
-              <a:t>N </a:t>
-            </a:r>
-            <a:r>
-              <a:rPr lang="ru-RU" dirty="0"/>
-              <a:t>при Хар4 ≤ 0.5</a:t>
-            </a:r>
-          </a:p>
-        </p:txBody>
-      </p:sp>
-      <p:pic>
-        <p:nvPicPr>
-          <p:cNvPr id="5" name="Объект 4">
-            <a:extLst>
-              <a:ext uri="{FF2B5EF4-FFF2-40B4-BE49-F238E27FC236}">
-                <a16:creationId xmlns:a16="http://schemas.microsoft.com/office/drawing/2014/main" id="{9A2B137F-BC60-F748-A17C-A4B6A0A17CDE}"/>
-              </a:ext>
-            </a:extLst>
-          </p:cNvPr>
-          <p:cNvPicPr>
-            <a:picLocks noGrp="1" noChangeAspect="1"/>
-          </p:cNvPicPr>
-          <p:nvPr>
-            <p:ph idx="1"/>
-          </p:nvPr>
-        </p:nvPicPr>
-        <p:blipFill>
-          <a:blip r:embed="rId2"/>
-          <a:stretch>
-            <a:fillRect/>
-          </a:stretch>
-        </p:blipFill>
-        <p:spPr>
-          <a:xfrm>
-            <a:off x="3308349" y="2466578"/>
-            <a:ext cx="5575300" cy="2374900"/>
-          </a:xfrm>
-        </p:spPr>
-      </p:pic>
-      <p:sp>
-        <p:nvSpPr>
-          <p:cNvPr id="6" name="TextBox 5">
-            <a:extLst>
-              <a:ext uri="{FF2B5EF4-FFF2-40B4-BE49-F238E27FC236}">
-                <a16:creationId xmlns:a16="http://schemas.microsoft.com/office/drawing/2014/main" id="{C347FD86-9B73-FC40-976A-3AD3E16200BA}"/>
-              </a:ext>
-            </a:extLst>
-          </p:cNvPr>
-          <p:cNvSpPr txBox="1"/>
-          <p:nvPr/>
-        </p:nvSpPr>
-        <p:spPr>
-          <a:xfrm>
-            <a:off x="2388318" y="5154644"/>
-            <a:ext cx="7415363" cy="1477328"/>
-          </a:xfrm>
-          <a:prstGeom prst="rect">
-            <a:avLst/>
-          </a:prstGeom>
-          <a:noFill/>
-        </p:spPr>
-        <p:txBody>
-          <a:bodyPr wrap="none" rtlCol="0">
-            <a:spAutoFit/>
-          </a:bodyPr>
-          <a:lstStyle/>
-          <a:p>
-            <a:pPr>
-              <a:buFont typeface="Arial" panose="020B0604020202020204" pitchFamily="34" charset="0"/>
-              <a:buChar char="•"/>
-            </a:pPr>
-            <a:r>
-              <a:rPr lang="ru-RU" b="1" dirty="0">
-                <a:effectLst/>
-              </a:rPr>
-              <a:t>Для </a:t>
-            </a:r>
-            <a:r>
-              <a:rPr lang="en" dirty="0"/>
-              <a:t> 𝛼 = 50</a:t>
-            </a:r>
-            <a:r>
-              <a:rPr lang="en" b="1" dirty="0">
-                <a:effectLst/>
-              </a:rPr>
-              <a:t>: </a:t>
-            </a:r>
-            <a:r>
-              <a:rPr lang="ru-RU" dirty="0">
-                <a:effectLst/>
-              </a:rPr>
-              <a:t>Максимум </a:t>
-            </a:r>
-            <a:r>
-              <a:rPr lang="ru-RU" dirty="0">
-                <a:effectLst/>
-                <a:latin typeface="Arial" panose="020B0604020202020204" pitchFamily="34" charset="0"/>
-                <a:cs typeface="Arial" panose="020B0604020202020204" pitchFamily="34" charset="0"/>
-              </a:rPr>
-              <a:t>83</a:t>
-            </a:r>
-            <a:r>
-              <a:rPr lang="ru-RU" dirty="0">
-                <a:effectLst/>
-              </a:rPr>
-              <a:t> хоста могут работать одновременно</a:t>
-            </a:r>
-          </a:p>
-          <a:p>
-            <a:pPr>
-              <a:buFont typeface="Arial" panose="020B0604020202020204" pitchFamily="34" charset="0"/>
-              <a:buChar char="•"/>
-            </a:pPr>
-            <a:r>
-              <a:rPr lang="ru-RU" dirty="0">
-                <a:effectLst/>
-              </a:rPr>
-              <a:t>При этом канал будет примерно </a:t>
-            </a:r>
-            <a:r>
-              <a:rPr lang="ru-RU" dirty="0">
-                <a:effectLst/>
-                <a:latin typeface="Arial" panose="020B0604020202020204" pitchFamily="34" charset="0"/>
-                <a:cs typeface="Arial" panose="020B0604020202020204" pitchFamily="34" charset="0"/>
-              </a:rPr>
-              <a:t>50</a:t>
-            </a:r>
-            <a:r>
-              <a:rPr lang="ru-RU" dirty="0">
-                <a:effectLst/>
-              </a:rPr>
-              <a:t>%</a:t>
-            </a:r>
-          </a:p>
-          <a:p>
-            <a:pPr>
-              <a:buFont typeface="Arial" panose="020B0604020202020204" pitchFamily="34" charset="0"/>
-              <a:buChar char="•"/>
-            </a:pPr>
-            <a:r>
-              <a:rPr lang="ru-RU" dirty="0">
-                <a:effectLst/>
-              </a:rPr>
-              <a:t>При </a:t>
-            </a:r>
-            <a:r>
-              <a:rPr lang="ru-RU" sz="1600" dirty="0">
-                <a:effectLst/>
-                <a:latin typeface="Arial" panose="020B0604020202020204" pitchFamily="34" charset="0"/>
-                <a:cs typeface="Arial" panose="020B0604020202020204" pitchFamily="34" charset="0"/>
-              </a:rPr>
-              <a:t>84</a:t>
-            </a:r>
-            <a:r>
-              <a:rPr lang="ru-RU" dirty="0">
-                <a:effectLst/>
-              </a:rPr>
-              <a:t> хостах канал перегружается (занятость &gt; </a:t>
-            </a:r>
-            <a:r>
-              <a:rPr lang="ru-RU" dirty="0">
-                <a:effectLst/>
-                <a:latin typeface="Arial" panose="020B0604020202020204" pitchFamily="34" charset="0"/>
-                <a:cs typeface="Arial" panose="020B0604020202020204" pitchFamily="34" charset="0"/>
-              </a:rPr>
-              <a:t>50</a:t>
-            </a:r>
-            <a:r>
-              <a:rPr lang="ru-RU" dirty="0">
-                <a:effectLst/>
-              </a:rPr>
-              <a:t>%)</a:t>
-            </a:r>
-          </a:p>
-          <a:p>
-            <a:r>
-              <a:rPr lang="ru-RU" dirty="0"/>
-              <a:t>Следовательно, </a:t>
-            </a:r>
-            <a:r>
-              <a:rPr lang="en-US" dirty="0"/>
-              <a:t>N = 83, </a:t>
-            </a:r>
-            <a:r>
-              <a:rPr lang="ru-RU" dirty="0"/>
-              <a:t>при этом Хар</a:t>
-            </a:r>
-            <a:r>
-              <a:rPr lang="ru-RU" sz="1600" dirty="0">
-                <a:latin typeface="Arial" panose="020B0604020202020204" pitchFamily="34" charset="0"/>
-                <a:cs typeface="Arial" panose="020B0604020202020204" pitchFamily="34" charset="0"/>
-              </a:rPr>
-              <a:t>1</a:t>
-            </a:r>
-            <a:r>
-              <a:rPr lang="ru-RU" dirty="0"/>
-              <a:t> (ср. доля потерянных пакетов) = 0</a:t>
-            </a:r>
-            <a:br>
-              <a:rPr lang="ru-RU" dirty="0"/>
-            </a:br>
-            <a:endParaRPr lang="ru-RU" dirty="0"/>
-          </a:p>
-        </p:txBody>
-      </p:sp>
-    </p:spTree>
-    <p:extLst>
-      <p:ext uri="{BB962C8B-B14F-4D97-AF65-F5344CB8AC3E}">
-        <p14:creationId xmlns:p14="http://schemas.microsoft.com/office/powerpoint/2010/main" val="2161612008"/>
-      </p:ext>
-    </p:extLst>
-  </p:cSld>
-  <p:clrMapOvr>
-    <a:masterClrMapping/>
-  </p:clrMapOvr>
-</p:sld>
-</file>
-
 <file path=ppt/slides/slide15.xml><?xml version="1.0" encoding="utf-8"?>
 <p:sld xmlns:a="http://schemas.openxmlformats.org/drawingml/2006/main" xmlns:r="http://schemas.openxmlformats.org/officeDocument/2006/relationships" xmlns:p="http://schemas.openxmlformats.org/presentationml/2006/main">
   <p:cSld>
@@ -4738,6 +4583,267 @@
           <p:cNvPr id="2" name="Заголовок 1">
             <a:extLst>
               <a:ext uri="{FF2B5EF4-FFF2-40B4-BE49-F238E27FC236}">
+                <a16:creationId xmlns:a16="http://schemas.microsoft.com/office/drawing/2014/main" id="{1A80844B-8862-D249-AE64-B5FDD780F8CC}"/>
+              </a:ext>
+            </a:extLst>
+          </p:cNvPr>
+          <p:cNvSpPr>
+            <a:spLocks noGrp="1"/>
+          </p:cNvSpPr>
+          <p:nvPr>
+            <p:ph type="title"/>
+          </p:nvPr>
+        </p:nvSpPr>
+        <p:spPr/>
+        <p:txBody>
+          <a:bodyPr/>
+          <a:lstStyle/>
+          <a:p>
+            <a:r>
+              <a:rPr lang="ru-RU" dirty="0"/>
+              <a:t>Нахождение максимального </a:t>
+            </a:r>
+            <a:r>
+              <a:rPr lang="en" dirty="0"/>
+              <a:t>N </a:t>
+            </a:r>
+            <a:r>
+              <a:rPr lang="ru-RU" dirty="0"/>
+              <a:t>при Хар4 ≤ 0.5</a:t>
+            </a:r>
+          </a:p>
+        </p:txBody>
+      </p:sp>
+      <p:pic>
+        <p:nvPicPr>
+          <p:cNvPr id="5" name="Объект 4">
+            <a:extLst>
+              <a:ext uri="{FF2B5EF4-FFF2-40B4-BE49-F238E27FC236}">
+                <a16:creationId xmlns:a16="http://schemas.microsoft.com/office/drawing/2014/main" id="{9A2B137F-BC60-F748-A17C-A4B6A0A17CDE}"/>
+              </a:ext>
+            </a:extLst>
+          </p:cNvPr>
+          <p:cNvPicPr>
+            <a:picLocks noGrp="1" noChangeAspect="1"/>
+          </p:cNvPicPr>
+          <p:nvPr>
+            <p:ph idx="1"/>
+          </p:nvPr>
+        </p:nvPicPr>
+        <p:blipFill>
+          <a:blip r:embed="rId2"/>
+          <a:stretch>
+            <a:fillRect/>
+          </a:stretch>
+        </p:blipFill>
+        <p:spPr>
+          <a:xfrm>
+            <a:off x="3308349" y="2466578"/>
+            <a:ext cx="5575300" cy="2374900"/>
+          </a:xfrm>
+        </p:spPr>
+      </p:pic>
+      <p:sp>
+        <p:nvSpPr>
+          <p:cNvPr id="6" name="TextBox 5">
+            <a:extLst>
+              <a:ext uri="{FF2B5EF4-FFF2-40B4-BE49-F238E27FC236}">
+                <a16:creationId xmlns:a16="http://schemas.microsoft.com/office/drawing/2014/main" id="{C347FD86-9B73-FC40-976A-3AD3E16200BA}"/>
+              </a:ext>
+            </a:extLst>
+          </p:cNvPr>
+          <p:cNvSpPr txBox="1"/>
+          <p:nvPr/>
+        </p:nvSpPr>
+        <p:spPr>
+          <a:xfrm>
+            <a:off x="2388318" y="5154644"/>
+            <a:ext cx="7415363" cy="1477328"/>
+          </a:xfrm>
+          <a:prstGeom prst="rect">
+            <a:avLst/>
+          </a:prstGeom>
+          <a:noFill/>
+        </p:spPr>
+        <p:txBody>
+          <a:bodyPr wrap="none" rtlCol="0">
+            <a:spAutoFit/>
+          </a:bodyPr>
+          <a:lstStyle/>
+          <a:p>
+            <a:pPr>
+              <a:buFont typeface="Arial" panose="020B0604020202020204" pitchFamily="34" charset="0"/>
+              <a:buChar char="•"/>
+            </a:pPr>
+            <a:r>
+              <a:rPr lang="ru-RU" b="1" dirty="0">
+                <a:effectLst/>
+              </a:rPr>
+              <a:t>Для </a:t>
+            </a:r>
+            <a:r>
+              <a:rPr lang="en" dirty="0"/>
+              <a:t> 𝛼 = 50</a:t>
+            </a:r>
+            <a:r>
+              <a:rPr lang="en" b="1" dirty="0">
+                <a:effectLst/>
+              </a:rPr>
+              <a:t>: </a:t>
+            </a:r>
+            <a:r>
+              <a:rPr lang="ru-RU" dirty="0">
+                <a:effectLst/>
+              </a:rPr>
+              <a:t>Максимум </a:t>
+            </a:r>
+            <a:r>
+              <a:rPr lang="ru-RU" dirty="0">
+                <a:effectLst/>
+                <a:latin typeface="Arial" panose="020B0604020202020204" pitchFamily="34" charset="0"/>
+                <a:cs typeface="Arial" panose="020B0604020202020204" pitchFamily="34" charset="0"/>
+              </a:rPr>
+              <a:t>83</a:t>
+            </a:r>
+            <a:r>
+              <a:rPr lang="ru-RU" dirty="0">
+                <a:effectLst/>
+              </a:rPr>
+              <a:t> хоста могут работать одновременно</a:t>
+            </a:r>
+          </a:p>
+          <a:p>
+            <a:pPr>
+              <a:buFont typeface="Arial" panose="020B0604020202020204" pitchFamily="34" charset="0"/>
+              <a:buChar char="•"/>
+            </a:pPr>
+            <a:r>
+              <a:rPr lang="ru-RU" dirty="0">
+                <a:effectLst/>
+              </a:rPr>
+              <a:t>При этом канал будет примерно </a:t>
+            </a:r>
+            <a:r>
+              <a:rPr lang="ru-RU" dirty="0">
+                <a:effectLst/>
+                <a:latin typeface="Arial" panose="020B0604020202020204" pitchFamily="34" charset="0"/>
+                <a:cs typeface="Arial" panose="020B0604020202020204" pitchFamily="34" charset="0"/>
+              </a:rPr>
+              <a:t>50</a:t>
+            </a:r>
+            <a:r>
+              <a:rPr lang="ru-RU" dirty="0">
+                <a:effectLst/>
+              </a:rPr>
+              <a:t>%</a:t>
+            </a:r>
+          </a:p>
+          <a:p>
+            <a:pPr>
+              <a:buFont typeface="Arial" panose="020B0604020202020204" pitchFamily="34" charset="0"/>
+              <a:buChar char="•"/>
+            </a:pPr>
+            <a:r>
+              <a:rPr lang="ru-RU" dirty="0">
+                <a:effectLst/>
+              </a:rPr>
+              <a:t>При </a:t>
+            </a:r>
+            <a:r>
+              <a:rPr lang="ru-RU" sz="1600" dirty="0">
+                <a:effectLst/>
+                <a:latin typeface="Arial" panose="020B0604020202020204" pitchFamily="34" charset="0"/>
+                <a:cs typeface="Arial" panose="020B0604020202020204" pitchFamily="34" charset="0"/>
+              </a:rPr>
+              <a:t>84</a:t>
+            </a:r>
+            <a:r>
+              <a:rPr lang="ru-RU" dirty="0">
+                <a:effectLst/>
+              </a:rPr>
+              <a:t> хостах канал перегружается (занятость &gt; </a:t>
+            </a:r>
+            <a:r>
+              <a:rPr lang="ru-RU" dirty="0">
+                <a:effectLst/>
+                <a:latin typeface="Arial" panose="020B0604020202020204" pitchFamily="34" charset="0"/>
+                <a:cs typeface="Arial" panose="020B0604020202020204" pitchFamily="34" charset="0"/>
+              </a:rPr>
+              <a:t>50</a:t>
+            </a:r>
+            <a:r>
+              <a:rPr lang="ru-RU" dirty="0">
+                <a:effectLst/>
+              </a:rPr>
+              <a:t>%)</a:t>
+            </a:r>
+          </a:p>
+          <a:p>
+            <a:r>
+              <a:rPr lang="ru-RU" dirty="0"/>
+              <a:t>Следовательно, </a:t>
+            </a:r>
+            <a:r>
+              <a:rPr lang="en-US" dirty="0"/>
+              <a:t>N = 83, </a:t>
+            </a:r>
+            <a:r>
+              <a:rPr lang="ru-RU" dirty="0"/>
+              <a:t>при этом Хар</a:t>
+            </a:r>
+            <a:r>
+              <a:rPr lang="ru-RU" sz="1600" dirty="0">
+                <a:latin typeface="Arial" panose="020B0604020202020204" pitchFamily="34" charset="0"/>
+                <a:cs typeface="Arial" panose="020B0604020202020204" pitchFamily="34" charset="0"/>
+              </a:rPr>
+              <a:t>1</a:t>
+            </a:r>
+            <a:r>
+              <a:rPr lang="ru-RU" dirty="0"/>
+              <a:t> (ср. доля потерянных пакетов) = 0</a:t>
+            </a:r>
+            <a:br>
+              <a:rPr lang="ru-RU" dirty="0"/>
+            </a:br>
+            <a:endParaRPr lang="ru-RU" dirty="0"/>
+          </a:p>
+        </p:txBody>
+      </p:sp>
+    </p:spTree>
+    <p:extLst>
+      <p:ext uri="{BB962C8B-B14F-4D97-AF65-F5344CB8AC3E}">
+        <p14:creationId xmlns:p14="http://schemas.microsoft.com/office/powerpoint/2010/main" val="2161612008"/>
+      </p:ext>
+    </p:extLst>
+  </p:cSld>
+  <p:clrMapOvr>
+    <a:masterClrMapping/>
+  </p:clrMapOvr>
+</p:sld>
+</file>
+
+<file path=ppt/slides/slide16.xml><?xml version="1.0" encoding="utf-8"?>
+<p:sld xmlns:a="http://schemas.openxmlformats.org/drawingml/2006/main" xmlns:r="http://schemas.openxmlformats.org/officeDocument/2006/relationships" xmlns:p="http://schemas.openxmlformats.org/presentationml/2006/main">
+  <p:cSld>
+    <p:spTree>
+      <p:nvGrpSpPr>
+        <p:cNvPr id="1" name=""/>
+        <p:cNvGrpSpPr/>
+        <p:nvPr/>
+      </p:nvGrpSpPr>
+      <p:grpSpPr>
+        <a:xfrm>
+          <a:off x="0" y="0"/>
+          <a:ext cx="0" cy="0"/>
+          <a:chOff x="0" y="0"/>
+          <a:chExt cx="0" cy="0"/>
+        </a:xfrm>
+      </p:grpSpPr>
+      <p:sp>
+        <p:nvSpPr>
+          <p:cNvPr id="2" name="Заголовок 1">
+            <a:extLst>
+              <a:ext uri="{FF2B5EF4-FFF2-40B4-BE49-F238E27FC236}">
                 <a16:creationId xmlns:a16="http://schemas.microsoft.com/office/drawing/2014/main" id="{E656F461-3E58-A54D-B2D7-4A1041B5DFB5}"/>
               </a:ext>
             </a:extLst>
@@ -4827,6 +4933,66 @@
           </a:p>
         </p:txBody>
       </p:sp>
+      <p:pic>
+        <p:nvPicPr>
+          <p:cNvPr id="5" name="Рисунок 4">
+            <a:extLst>
+              <a:ext uri="{FF2B5EF4-FFF2-40B4-BE49-F238E27FC236}">
+                <a16:creationId xmlns:a16="http://schemas.microsoft.com/office/drawing/2014/main" id="{A8BE4A27-210E-1C46-8933-FEA7FBA6B59D}"/>
+              </a:ext>
+            </a:extLst>
+          </p:cNvPr>
+          <p:cNvPicPr>
+            <a:picLocks noChangeAspect="1"/>
+          </p:cNvPicPr>
+          <p:nvPr/>
+        </p:nvPicPr>
+        <p:blipFill>
+          <a:blip r:embed="rId2"/>
+          <a:stretch>
+            <a:fillRect/>
+          </a:stretch>
+        </p:blipFill>
+        <p:spPr>
+          <a:xfrm>
+            <a:off x="622300" y="3756131"/>
+            <a:ext cx="5473700" cy="2222500"/>
+          </a:xfrm>
+          <a:prstGeom prst="rect">
+            <a:avLst/>
+          </a:prstGeom>
+        </p:spPr>
+      </p:pic>
+      <p:pic>
+        <p:nvPicPr>
+          <p:cNvPr id="7" name="Рисунок 6">
+            <a:extLst>
+              <a:ext uri="{FF2B5EF4-FFF2-40B4-BE49-F238E27FC236}">
+                <a16:creationId xmlns:a16="http://schemas.microsoft.com/office/drawing/2014/main" id="{94C4CD31-93F6-E54B-9A12-DB28EC2D276C}"/>
+              </a:ext>
+            </a:extLst>
+          </p:cNvPr>
+          <p:cNvPicPr>
+            <a:picLocks noChangeAspect="1"/>
+          </p:cNvPicPr>
+          <p:nvPr/>
+        </p:nvPicPr>
+        <p:blipFill>
+          <a:blip r:embed="rId3"/>
+          <a:stretch>
+            <a:fillRect/>
+          </a:stretch>
+        </p:blipFill>
+        <p:spPr>
+          <a:xfrm>
+            <a:off x="6232204" y="3570360"/>
+            <a:ext cx="5473700" cy="3046339"/>
+          </a:xfrm>
+          <a:prstGeom prst="rect">
+            <a:avLst/>
+          </a:prstGeom>
+        </p:spPr>
+      </p:pic>
     </p:spTree>
     <p:extLst>
       <p:ext uri="{BB962C8B-B14F-4D97-AF65-F5344CB8AC3E}">
@@ -4840,7 +5006,7 @@
 </p:sld>
 </file>
 
-<file path=ppt/slides/slide16.xml><?xml version="1.0" encoding="utf-8"?>
+<file path=ppt/slides/slide17.xml><?xml version="1.0" encoding="utf-8"?>
 <p:sld xmlns:a="http://schemas.openxmlformats.org/drawingml/2006/main" xmlns:r="http://schemas.openxmlformats.org/officeDocument/2006/relationships" xmlns:p="http://schemas.openxmlformats.org/presentationml/2006/main">
   <p:cSld>
     <p:spTree>
@@ -5136,7 +5302,7 @@
 </p:sld>
 </file>
 
-<file path=ppt/slides/slide17.xml><?xml version="1.0" encoding="utf-8"?>
+<file path=ppt/slides/slide18.xml><?xml version="1.0" encoding="utf-8"?>
 <p:sld xmlns:a="http://schemas.openxmlformats.org/drawingml/2006/main" xmlns:r="http://schemas.openxmlformats.org/officeDocument/2006/relationships" xmlns:p="http://schemas.openxmlformats.org/presentationml/2006/main">
   <p:cSld>
     <p:spTree>
@@ -5336,7 +5502,7 @@
 </p:sld>
 </file>
 
-<file path=ppt/slides/slide18.xml><?xml version="1.0" encoding="utf-8"?>
+<file path=ppt/slides/slide19.xml><?xml version="1.0" encoding="utf-8"?>
 <p:sld xmlns:a="http://schemas.openxmlformats.org/drawingml/2006/main" xmlns:r="http://schemas.openxmlformats.org/officeDocument/2006/relationships" xmlns:p="http://schemas.openxmlformats.org/presentationml/2006/main">
   <p:cSld>
     <p:spTree>
@@ -5832,7 +5998,215 @@
 </p:sld>
 </file>
 
-<file path=ppt/slides/slide19.xml><?xml version="1.0" encoding="utf-8"?>
+<file path=ppt/slides/slide2.xml><?xml version="1.0" encoding="utf-8"?>
+<p:sld xmlns:a="http://schemas.openxmlformats.org/drawingml/2006/main" xmlns:r="http://schemas.openxmlformats.org/officeDocument/2006/relationships" xmlns:p="http://schemas.openxmlformats.org/presentationml/2006/main">
+  <p:cSld>
+    <p:spTree>
+      <p:nvGrpSpPr>
+        <p:cNvPr id="1" name=""/>
+        <p:cNvGrpSpPr/>
+        <p:nvPr/>
+      </p:nvGrpSpPr>
+      <p:grpSpPr>
+        <a:xfrm>
+          <a:off x="0" y="0"/>
+          <a:ext cx="0" cy="0"/>
+          <a:chOff x="0" y="0"/>
+          <a:chExt cx="0" cy="0"/>
+        </a:xfrm>
+      </p:grpSpPr>
+      <p:sp>
+        <p:nvSpPr>
+          <p:cNvPr id="2" name="Заголовок 1">
+            <a:extLst>
+              <a:ext uri="{FF2B5EF4-FFF2-40B4-BE49-F238E27FC236}">
+                <a16:creationId xmlns:a16="http://schemas.microsoft.com/office/drawing/2014/main" id="{91361C2A-EC42-1348-B6FE-58E7AF5A6980}"/>
+              </a:ext>
+            </a:extLst>
+          </p:cNvPr>
+          <p:cNvSpPr>
+            <a:spLocks noGrp="1"/>
+          </p:cNvSpPr>
+          <p:nvPr>
+            <p:ph type="title"/>
+          </p:nvPr>
+        </p:nvSpPr>
+        <p:spPr/>
+        <p:txBody>
+          <a:bodyPr>
+            <a:normAutofit/>
+          </a:bodyPr>
+          <a:lstStyle/>
+          <a:p>
+            <a:r>
+              <a:rPr lang="ru-RU" dirty="0"/>
+              <a:t>Цель работы</a:t>
+            </a:r>
+          </a:p>
+        </p:txBody>
+      </p:sp>
+      <p:sp>
+        <p:nvSpPr>
+          <p:cNvPr id="3" name="Объект 2">
+            <a:extLst>
+              <a:ext uri="{FF2B5EF4-FFF2-40B4-BE49-F238E27FC236}">
+                <a16:creationId xmlns:a16="http://schemas.microsoft.com/office/drawing/2014/main" id="{97F60FA7-403C-3143-AD37-C474D5688B2F}"/>
+              </a:ext>
+            </a:extLst>
+          </p:cNvPr>
+          <p:cNvSpPr>
+            <a:spLocks noGrp="1"/>
+          </p:cNvSpPr>
+          <p:nvPr>
+            <p:ph idx="1"/>
+          </p:nvPr>
+        </p:nvSpPr>
+        <p:spPr/>
+        <p:txBody>
+          <a:bodyPr/>
+          <a:lstStyle/>
+          <a:p>
+            <a:pPr marL="0" indent="0">
+              <a:buNone/>
+            </a:pPr>
+            <a:r>
+              <a:rPr lang="ru-RU" dirty="0"/>
+              <a:t>Изучить работу сегмента сети </a:t>
+            </a:r>
+            <a:r>
+              <a:rPr lang="en" dirty="0"/>
+              <a:t>CSMA </a:t>
+            </a:r>
+            <a:r>
+              <a:rPr lang="ru-RU" dirty="0"/>
+              <a:t>при различных значениях интенсивности генерации пакетов </a:t>
+            </a:r>
+            <a:r>
+              <a:rPr lang="el-GR" dirty="0"/>
+              <a:t>α </a:t>
+            </a:r>
+            <a:r>
+              <a:rPr lang="ru-RU" dirty="0"/>
+              <a:t>и различном числе станций </a:t>
+            </a:r>
+            <a:r>
+              <a:rPr lang="en" dirty="0"/>
+              <a:t>N, </a:t>
+            </a:r>
+            <a:r>
+              <a:rPr lang="ru-RU" dirty="0"/>
+              <a:t>исследовать поведение очередей адаптеров, занятость канала и потери пакетов в условиях отсутствия коллизий.</a:t>
+            </a:r>
+          </a:p>
+          <a:p>
+            <a:endParaRPr lang="ru-RU" dirty="0"/>
+          </a:p>
+          <a:p>
+            <a:endParaRPr lang="ru-RU" dirty="0"/>
+          </a:p>
+        </p:txBody>
+      </p:sp>
+    </p:spTree>
+    <p:extLst>
+      <p:ext uri="{BB962C8B-B14F-4D97-AF65-F5344CB8AC3E}">
+        <p14:creationId xmlns:p14="http://schemas.microsoft.com/office/powerpoint/2010/main" val="385998421"/>
+      </p:ext>
+    </p:extLst>
+  </p:cSld>
+  <p:clrMapOvr>
+    <a:masterClrMapping/>
+  </p:clrMapOvr>
+</p:sld>
+</file>
+
+<file path=ppt/slides/slide20.xml><?xml version="1.0" encoding="utf-8"?>
+<p:sld xmlns:a="http://schemas.openxmlformats.org/drawingml/2006/main" xmlns:r="http://schemas.openxmlformats.org/officeDocument/2006/relationships" xmlns:p="http://schemas.openxmlformats.org/presentationml/2006/main">
+  <p:cSld>
+    <p:spTree>
+      <p:nvGrpSpPr>
+        <p:cNvPr id="1" name=""/>
+        <p:cNvGrpSpPr/>
+        <p:nvPr/>
+      </p:nvGrpSpPr>
+      <p:grpSpPr>
+        <a:xfrm>
+          <a:off x="0" y="0"/>
+          <a:ext cx="0" cy="0"/>
+          <a:chOff x="0" y="0"/>
+          <a:chExt cx="0" cy="0"/>
+        </a:xfrm>
+      </p:grpSpPr>
+      <p:sp>
+        <p:nvSpPr>
+          <p:cNvPr id="2" name="Заголовок 1">
+            <a:extLst>
+              <a:ext uri="{FF2B5EF4-FFF2-40B4-BE49-F238E27FC236}">
+                <a16:creationId xmlns:a16="http://schemas.microsoft.com/office/drawing/2014/main" id="{F595FEE8-2CD7-9645-9327-4D278537D622}"/>
+              </a:ext>
+            </a:extLst>
+          </p:cNvPr>
+          <p:cNvSpPr>
+            <a:spLocks noGrp="1"/>
+          </p:cNvSpPr>
+          <p:nvPr>
+            <p:ph type="title"/>
+          </p:nvPr>
+        </p:nvSpPr>
+        <p:spPr/>
+        <p:txBody>
+          <a:bodyPr/>
+          <a:lstStyle/>
+          <a:p>
+            <a:r>
+              <a:rPr lang="ru-RU" dirty="0"/>
+              <a:t>Дополнительное исследование</a:t>
+            </a:r>
+          </a:p>
+        </p:txBody>
+      </p:sp>
+      <p:pic>
+        <p:nvPicPr>
+          <p:cNvPr id="5" name="Объект 4">
+            <a:extLst>
+              <a:ext uri="{FF2B5EF4-FFF2-40B4-BE49-F238E27FC236}">
+                <a16:creationId xmlns:a16="http://schemas.microsoft.com/office/drawing/2014/main" id="{F63340E8-3EA6-1D4F-A297-4E00EF2A236D}"/>
+              </a:ext>
+            </a:extLst>
+          </p:cNvPr>
+          <p:cNvPicPr>
+            <a:picLocks noGrp="1" noChangeAspect="1"/>
+          </p:cNvPicPr>
+          <p:nvPr>
+            <p:ph idx="1"/>
+          </p:nvPr>
+        </p:nvPicPr>
+        <p:blipFill>
+          <a:blip r:embed="rId2"/>
+          <a:stretch>
+            <a:fillRect/>
+          </a:stretch>
+        </p:blipFill>
+        <p:spPr>
+          <a:xfrm>
+            <a:off x="2720366" y="2543831"/>
+            <a:ext cx="6751267" cy="3586988"/>
+          </a:xfrm>
+        </p:spPr>
+      </p:pic>
+    </p:spTree>
+    <p:extLst>
+      <p:ext uri="{BB962C8B-B14F-4D97-AF65-F5344CB8AC3E}">
+        <p14:creationId xmlns:p14="http://schemas.microsoft.com/office/powerpoint/2010/main" val="4236405990"/>
+      </p:ext>
+    </p:extLst>
+  </p:cSld>
+  <p:clrMapOvr>
+    <a:masterClrMapping/>
+  </p:clrMapOvr>
+</p:sld>
+</file>
+
+<file path=ppt/slides/slide21.xml><?xml version="1.0" encoding="utf-8"?>
 <p:sld xmlns:a="http://schemas.openxmlformats.org/drawingml/2006/main" xmlns:r="http://schemas.openxmlformats.org/officeDocument/2006/relationships" xmlns:p="http://schemas.openxmlformats.org/presentationml/2006/main">
   <p:cSld>
     <p:spTree>
@@ -5928,7 +6302,7 @@
 </p:sld>
 </file>
 
-<file path=ppt/slides/slide2.xml><?xml version="1.0" encoding="utf-8"?>
+<file path=ppt/slides/slide22.xml><?xml version="1.0" encoding="utf-8"?>
 <p:sld xmlns:a="http://schemas.openxmlformats.org/drawingml/2006/main" xmlns:r="http://schemas.openxmlformats.org/officeDocument/2006/relationships" xmlns:p="http://schemas.openxmlformats.org/presentationml/2006/main">
   <p:cSld>
     <p:spTree>
@@ -5950,7 +6324,7 @@
           <p:cNvPr id="2" name="Заголовок 1">
             <a:extLst>
               <a:ext uri="{FF2B5EF4-FFF2-40B4-BE49-F238E27FC236}">
-                <a16:creationId xmlns:a16="http://schemas.microsoft.com/office/drawing/2014/main" id="{91361C2A-EC42-1348-B6FE-58E7AF5A6980}"/>
+                <a16:creationId xmlns:a16="http://schemas.microsoft.com/office/drawing/2014/main" id="{68AA9CAE-D58D-FD4D-B517-D2D455E8DFD9}"/>
               </a:ext>
             </a:extLst>
           </p:cNvPr>
@@ -5963,14 +6337,12 @@
         </p:nvSpPr>
         <p:spPr/>
         <p:txBody>
-          <a:bodyPr>
-            <a:normAutofit/>
-          </a:bodyPr>
+          <a:bodyPr/>
           <a:lstStyle/>
           <a:p>
             <a:r>
               <a:rPr lang="ru-RU" dirty="0"/>
-              <a:t>Цель работы</a:t>
+              <a:t>Результаты</a:t>
             </a:r>
           </a:p>
         </p:txBody>
@@ -5980,7 +6352,7 @@
           <p:cNvPr id="3" name="Объект 2">
             <a:extLst>
               <a:ext uri="{FF2B5EF4-FFF2-40B4-BE49-F238E27FC236}">
-                <a16:creationId xmlns:a16="http://schemas.microsoft.com/office/drawing/2014/main" id="{97F60FA7-403C-3143-AD37-C474D5688B2F}"/>
+                <a16:creationId xmlns:a16="http://schemas.microsoft.com/office/drawing/2014/main" id="{1EC1DD32-C10C-FD45-8A83-B4B2EF058C73}"/>
               </a:ext>
             </a:extLst>
           </p:cNvPr>
@@ -5996,50 +6368,114 @@
           <a:bodyPr/>
           <a:lstStyle/>
           <a:p>
-            <a:pPr marL="0" indent="0">
-              <a:buNone/>
+            <a:pPr marL="342900" lvl="0" indent="-342900">
+              <a:buFont typeface="Symbol" pitchFamily="2" charset="2"/>
+              <a:buChar char=""/>
             </a:pPr>
             <a:r>
-              <a:rPr lang="ru-RU" dirty="0"/>
-              <a:t>Изучить работу сегмента сети </a:t>
-            </a:r>
-            <a:r>
-              <a:rPr lang="en" dirty="0"/>
-              <a:t>CSMA </a:t>
-            </a:r>
-            <a:r>
-              <a:rPr lang="ru-RU" dirty="0"/>
-              <a:t>при различных значениях интенсивности генерации пакетов </a:t>
-            </a:r>
-            <a:r>
-              <a:rPr lang="el-GR" dirty="0"/>
-              <a:t>α </a:t>
-            </a:r>
-            <a:r>
-              <a:rPr lang="ru-RU" dirty="0"/>
-              <a:t>и различном числе станций </a:t>
-            </a:r>
-            <a:r>
-              <a:rPr lang="en" dirty="0"/>
-              <a:t>N, </a:t>
-            </a:r>
-            <a:r>
-              <a:rPr lang="ru-RU" dirty="0"/>
-              <a:t>исследовать поведение очередей адаптеров, занятость канала и потери пакетов в условиях отсутствия коллизий.</a:t>
-            </a:r>
-          </a:p>
-          <a:p>
-            <a:endParaRPr lang="ru-RU" dirty="0"/>
-          </a:p>
-          <a:p>
-            <a:endParaRPr lang="ru-RU" dirty="0"/>
+              <a:rPr lang="ru-RU" sz="1800" dirty="0">
+                <a:effectLst/>
+                <a:latin typeface="Times New Roman" panose="02020603050405020304" pitchFamily="18" charset="0"/>
+                <a:ea typeface="Times New Roman" panose="02020603050405020304" pitchFamily="18" charset="0"/>
+              </a:rPr>
+              <a:t>Прямая зависимость: </a:t>
+            </a:r>
+            <a:r>
+              <a:rPr lang="ru-RU" sz="1800" dirty="0" err="1">
+                <a:effectLst/>
+                <a:latin typeface="Times New Roman" panose="02020603050405020304" pitchFamily="18" charset="0"/>
+                <a:ea typeface="Times New Roman" panose="02020603050405020304" pitchFamily="18" charset="0"/>
+              </a:rPr>
+              <a:t>channel_util</a:t>
+            </a:r>
+            <a:r>
+              <a:rPr lang="ru-RU" sz="1800" dirty="0">
+                <a:effectLst/>
+                <a:latin typeface="Times New Roman" panose="02020603050405020304" pitchFamily="18" charset="0"/>
+                <a:ea typeface="Times New Roman" panose="02020603050405020304" pitchFamily="18" charset="0"/>
+              </a:rPr>
+              <a:t> линейно растёт с увеличением </a:t>
+            </a:r>
+            <a:r>
+              <a:rPr lang="ru-RU" sz="1800" dirty="0" err="1">
+                <a:effectLst/>
+                <a:latin typeface="Times New Roman" panose="02020603050405020304" pitchFamily="18" charset="0"/>
+                <a:ea typeface="Times New Roman" panose="02020603050405020304" pitchFamily="18" charset="0"/>
+              </a:rPr>
+              <a:t>l</a:t>
+            </a:r>
+            <a:endParaRPr lang="ru-RU" sz="1800" dirty="0">
+              <a:effectLst/>
+              <a:latin typeface="Times New Roman" panose="02020603050405020304" pitchFamily="18" charset="0"/>
+              <a:ea typeface="Times New Roman" panose="02020603050405020304" pitchFamily="18" charset="0"/>
+            </a:endParaRPr>
+          </a:p>
+          <a:p>
+            <a:pPr marL="342900" lvl="0" indent="-342900">
+              <a:buFont typeface="Symbol" pitchFamily="2" charset="2"/>
+              <a:buChar char=""/>
+            </a:pPr>
+            <a:r>
+              <a:rPr lang="ru-RU" sz="1800" dirty="0">
+                <a:effectLst/>
+                <a:latin typeface="Times New Roman" panose="02020603050405020304" pitchFamily="18" charset="0"/>
+                <a:ea typeface="Times New Roman" panose="02020603050405020304" pitchFamily="18" charset="0"/>
+              </a:rPr>
+              <a:t>Пропорциональность: примерно пропорциональна длине пакета</a:t>
+            </a:r>
+          </a:p>
+          <a:p>
+            <a:pPr marL="342900" lvl="0" indent="-342900">
+              <a:buFont typeface="Symbol" pitchFamily="2" charset="2"/>
+              <a:buChar char=""/>
+            </a:pPr>
+            <a:r>
+              <a:rPr lang="ru-RU" sz="1800" dirty="0">
+                <a:effectLst/>
+                <a:latin typeface="Times New Roman" panose="02020603050405020304" pitchFamily="18" charset="0"/>
+                <a:ea typeface="Times New Roman" panose="02020603050405020304" pitchFamily="18" charset="0"/>
+              </a:rPr>
+              <a:t>при </a:t>
+            </a:r>
+            <a:r>
+              <a:rPr lang="ru-RU" sz="1800" dirty="0" err="1">
+                <a:effectLst/>
+                <a:latin typeface="Times New Roman" panose="02020603050405020304" pitchFamily="18" charset="0"/>
+                <a:ea typeface="Times New Roman" panose="02020603050405020304" pitchFamily="18" charset="0"/>
+              </a:rPr>
+              <a:t>l</a:t>
+            </a:r>
+            <a:r>
+              <a:rPr lang="ru-RU" sz="1800" dirty="0">
+                <a:effectLst/>
+                <a:latin typeface="Times New Roman" panose="02020603050405020304" pitchFamily="18" charset="0"/>
+                <a:ea typeface="Times New Roman" panose="02020603050405020304" pitchFamily="18" charset="0"/>
+              </a:rPr>
+              <a:t> ≈ 2500 байт достигается </a:t>
+            </a:r>
+            <a:r>
+              <a:rPr lang="ru-RU" sz="1800" dirty="0" err="1">
+                <a:effectLst/>
+                <a:latin typeface="Times New Roman" panose="02020603050405020304" pitchFamily="18" charset="0"/>
+                <a:ea typeface="Times New Roman" panose="02020603050405020304" pitchFamily="18" charset="0"/>
+              </a:rPr>
+              <a:t>channel_util</a:t>
+            </a:r>
+            <a:r>
+              <a:rPr lang="ru-RU" sz="1800" dirty="0">
+                <a:effectLst/>
+                <a:latin typeface="Times New Roman" panose="02020603050405020304" pitchFamily="18" charset="0"/>
+                <a:ea typeface="Times New Roman" panose="02020603050405020304" pitchFamily="18" charset="0"/>
+              </a:rPr>
+              <a:t> ≈ 50% для данных параметров</a:t>
+            </a:r>
           </a:p>
         </p:txBody>
       </p:sp>
     </p:spTree>
     <p:extLst>
       <p:ext uri="{BB962C8B-B14F-4D97-AF65-F5344CB8AC3E}">
-        <p14:creationId xmlns:p14="http://schemas.microsoft.com/office/powerpoint/2010/main" val="385998421"/>
+        <p14:creationId xmlns:p14="http://schemas.microsoft.com/office/powerpoint/2010/main" val="2954500027"/>
       </p:ext>
     </p:extLst>
   </p:cSld>
@@ -6049,7 +6485,7 @@
 </p:sld>
 </file>
 
-<file path=ppt/slides/slide20.xml><?xml version="1.0" encoding="utf-8"?>
+<file path=ppt/slides/slide23.xml><?xml version="1.0" encoding="utf-8"?>
 <p:sld xmlns:a="http://schemas.openxmlformats.org/drawingml/2006/main" xmlns:r="http://schemas.openxmlformats.org/officeDocument/2006/relationships" xmlns:p="http://schemas.openxmlformats.org/presentationml/2006/main">
   <p:cSld>
     <p:spTree>
@@ -6071,7 +6507,7 @@
           <p:cNvPr id="2" name="Заголовок 1">
             <a:extLst>
               <a:ext uri="{FF2B5EF4-FFF2-40B4-BE49-F238E27FC236}">
-                <a16:creationId xmlns:a16="http://schemas.microsoft.com/office/drawing/2014/main" id="{68AA9CAE-D58D-FD4D-B517-D2D455E8DFD9}"/>
+                <a16:creationId xmlns:a16="http://schemas.microsoft.com/office/drawing/2014/main" id="{E643B799-D3D9-3E4E-9176-2CB79B29E1C1}"/>
               </a:ext>
             </a:extLst>
           </p:cNvPr>
@@ -6099,7 +6535,7 @@
           <p:cNvPr id="3" name="Объект 2">
             <a:extLst>
               <a:ext uri="{FF2B5EF4-FFF2-40B4-BE49-F238E27FC236}">
-                <a16:creationId xmlns:a16="http://schemas.microsoft.com/office/drawing/2014/main" id="{1EC1DD32-C10C-FD45-8A83-B4B2EF058C73}"/>
+                <a16:creationId xmlns:a16="http://schemas.microsoft.com/office/drawing/2014/main" id="{41805C9E-A47B-9A48-BD4E-76139329D41D}"/>
               </a:ext>
             </a:extLst>
           </p:cNvPr>
@@ -6115,41 +6551,57 @@
           <a:bodyPr/>
           <a:lstStyle/>
           <a:p>
-            <a:pPr marL="342900" lvl="0" indent="-342900">
-              <a:buFont typeface="Symbol" pitchFamily="2" charset="2"/>
-              <a:buChar char=""/>
+            <a:pPr>
+              <a:spcBef>
+                <a:spcPts val="1200"/>
+              </a:spcBef>
+              <a:spcAft>
+                <a:spcPts val="1200"/>
+              </a:spcAft>
             </a:pPr>
             <a:r>
+              <a:rPr lang="ru-RU" sz="1800" b="1" dirty="0">
+                <a:solidFill>
+                  <a:srgbClr val="0F1115"/>
+                </a:solidFill>
+                <a:effectLst/>
+                <a:latin typeface="quote-cjk-patch"/>
+                <a:ea typeface="Times New Roman" panose="02020603050405020304" pitchFamily="18" charset="0"/>
+              </a:rPr>
+              <a:t>Длина пакета является значимым параметром управления производительностью</a:t>
+            </a:r>
+            <a:r>
               <a:rPr lang="ru-RU" sz="1800" dirty="0">
-                <a:effectLst/>
-                <a:latin typeface="Times New Roman" panose="02020603050405020304" pitchFamily="18" charset="0"/>
+                <a:solidFill>
+                  <a:srgbClr val="0F1115"/>
+                </a:solidFill>
+                <a:effectLst/>
+                <a:latin typeface="quote-cjk-patch"/>
                 <a:ea typeface="Times New Roman" panose="02020603050405020304" pitchFamily="18" charset="0"/>
               </a:rPr>
-              <a:t>Прямая зависимость: </a:t>
-            </a:r>
-            <a:r>
-              <a:rPr lang="ru-RU" sz="1800" dirty="0" err="1">
-                <a:effectLst/>
-                <a:latin typeface="Times New Roman" panose="02020603050405020304" pitchFamily="18" charset="0"/>
+              <a:t> CSMA-сегмента сети. Линейная зависимость занятости канала от длины пакета позволяет </a:t>
+            </a:r>
+            <a:r>
+              <a:rPr lang="ru-RU" sz="1800" b="1" dirty="0">
+                <a:solidFill>
+                  <a:srgbClr val="0F1115"/>
+                </a:solidFill>
+                <a:effectLst/>
+                <a:latin typeface="quote-cjk-patch"/>
                 <a:ea typeface="Times New Roman" panose="02020603050405020304" pitchFamily="18" charset="0"/>
               </a:rPr>
-              <a:t>channel_util</a:t>
+              <a:t>точно прогнозировать и регулировать нагрузку</a:t>
             </a:r>
             <a:r>
               <a:rPr lang="ru-RU" sz="1800" dirty="0">
-                <a:effectLst/>
-                <a:latin typeface="Times New Roman" panose="02020603050405020304" pitchFamily="18" charset="0"/>
+                <a:solidFill>
+                  <a:srgbClr val="0F1115"/>
+                </a:solidFill>
+                <a:effectLst/>
+                <a:latin typeface="quote-cjk-patch"/>
                 <a:ea typeface="Times New Roman" panose="02020603050405020304" pitchFamily="18" charset="0"/>
               </a:rPr>
-              <a:t> линейно растёт с увеличением </a:t>
-            </a:r>
-            <a:r>
-              <a:rPr lang="ru-RU" sz="1800" dirty="0" err="1">
-                <a:effectLst/>
-                <a:latin typeface="Times New Roman" panose="02020603050405020304" pitchFamily="18" charset="0"/>
-                <a:ea typeface="Times New Roman" panose="02020603050405020304" pitchFamily="18" charset="0"/>
-              </a:rPr>
-              <a:t>l</a:t>
+              <a:t> на сеть.</a:t>
             </a:r>
             <a:endParaRPr lang="ru-RU" sz="1800" dirty="0">
               <a:effectLst/>
@@ -6158,71 +6610,62 @@
             </a:endParaRPr>
           </a:p>
           <a:p>
-            <a:pPr marL="342900" lvl="0" indent="-342900">
-              <a:buFont typeface="Symbol" pitchFamily="2" charset="2"/>
-              <a:buChar char=""/>
+            <a:pPr algn="l">
+              <a:spcBef>
+                <a:spcPts val="1200"/>
+              </a:spcBef>
+              <a:spcAft>
+                <a:spcPts val="1200"/>
+              </a:spcAft>
             </a:pPr>
             <a:r>
               <a:rPr lang="ru-RU" sz="1800" dirty="0">
-                <a:effectLst/>
-                <a:latin typeface="Times New Roman" panose="02020603050405020304" pitchFamily="18" charset="0"/>
+                <a:solidFill>
+                  <a:srgbClr val="0F1115"/>
+                </a:solidFill>
+                <a:effectLst/>
+                <a:latin typeface="quote-cjk-patch"/>
                 <a:ea typeface="Times New Roman" panose="02020603050405020304" pitchFamily="18" charset="0"/>
               </a:rPr>
-              <a:t>Пропорциональность: примерно пропорциональна длине пакета</a:t>
-            </a:r>
-          </a:p>
-          <a:p>
-            <a:pPr marL="342900" lvl="0" indent="-342900">
-              <a:buFont typeface="Symbol" pitchFamily="2" charset="2"/>
-              <a:buChar char=""/>
-            </a:pPr>
+              <a:t>При проектировании и настройке сетей необходимо </a:t>
+            </a:r>
+            <a:r>
+              <a:rPr lang="ru-RU" sz="1800" b="1" dirty="0">
+                <a:solidFill>
+                  <a:srgbClr val="0F1115"/>
+                </a:solidFill>
+                <a:effectLst/>
+                <a:latin typeface="quote-cjk-patch"/>
+                <a:ea typeface="Times New Roman" panose="02020603050405020304" pitchFamily="18" charset="0"/>
+              </a:rPr>
+              <a:t>учитывать не только количество станций и интенсивность трафика, но и размер передаваемых пакетов</a:t>
+            </a:r>
             <a:r>
               <a:rPr lang="ru-RU" sz="1800" dirty="0">
-                <a:effectLst/>
-                <a:latin typeface="Times New Roman" panose="02020603050405020304" pitchFamily="18" charset="0"/>
+                <a:solidFill>
+                  <a:srgbClr val="0F1115"/>
+                </a:solidFill>
+                <a:effectLst/>
+                <a:latin typeface="quote-cjk-patch"/>
                 <a:ea typeface="Times New Roman" panose="02020603050405020304" pitchFamily="18" charset="0"/>
               </a:rPr>
-              <a:t>при </a:t>
-            </a:r>
-            <a:r>
-              <a:rPr lang="ru-RU" sz="1800" dirty="0" err="1">
-                <a:effectLst/>
-                <a:latin typeface="Times New Roman" panose="02020603050405020304" pitchFamily="18" charset="0"/>
-                <a:ea typeface="Times New Roman" panose="02020603050405020304" pitchFamily="18" charset="0"/>
-              </a:rPr>
-              <a:t>l</a:t>
-            </a:r>
-            <a:r>
-              <a:rPr lang="ru-RU" sz="1800" dirty="0">
-                <a:effectLst/>
-                <a:latin typeface="Times New Roman" panose="02020603050405020304" pitchFamily="18" charset="0"/>
-                <a:ea typeface="Times New Roman" panose="02020603050405020304" pitchFamily="18" charset="0"/>
-              </a:rPr>
-              <a:t> ≈ 2500 байт достигается </a:t>
-            </a:r>
-            <a:r>
-              <a:rPr lang="ru-RU" sz="1800" dirty="0" err="1">
-                <a:effectLst/>
-                <a:latin typeface="Times New Roman" panose="02020603050405020304" pitchFamily="18" charset="0"/>
-                <a:ea typeface="Times New Roman" panose="02020603050405020304" pitchFamily="18" charset="0"/>
-              </a:rPr>
-              <a:t>channel_util</a:t>
-            </a:r>
-            <a:r>
-              <a:rPr lang="ru-RU" sz="1800" dirty="0">
-                <a:effectLst/>
-                <a:latin typeface="Times New Roman" panose="02020603050405020304" pitchFamily="18" charset="0"/>
-                <a:ea typeface="Times New Roman" panose="02020603050405020304" pitchFamily="18" charset="0"/>
-              </a:rPr>
-              <a:t> ≈ 50% для данных параметров</a:t>
-            </a:r>
+              <a:t>. Оптимизация этого параметра может существенно улучшить эффективность использования сетевых ресурсов без изменения топологии или аппаратного обеспечения.</a:t>
+            </a:r>
+            <a:endParaRPr lang="ru-RU" sz="1800" dirty="0">
+              <a:effectLst/>
+              <a:latin typeface="Times New Roman" panose="02020603050405020304" pitchFamily="18" charset="0"/>
+              <a:ea typeface="Times New Roman" panose="02020603050405020304" pitchFamily="18" charset="0"/>
+            </a:endParaRPr>
+          </a:p>
+          <a:p>
+            <a:endParaRPr lang="ru-RU" dirty="0"/>
           </a:p>
         </p:txBody>
       </p:sp>
     </p:spTree>
     <p:extLst>
       <p:ext uri="{BB962C8B-B14F-4D97-AF65-F5344CB8AC3E}">
-        <p14:creationId xmlns:p14="http://schemas.microsoft.com/office/powerpoint/2010/main" val="2954500027"/>
+        <p14:creationId xmlns:p14="http://schemas.microsoft.com/office/powerpoint/2010/main" val="454295614"/>
       </p:ext>
     </p:extLst>
   </p:cSld>
@@ -6232,7 +6675,7 @@
 </p:sld>
 </file>
 
-<file path=ppt/slides/slide21.xml><?xml version="1.0" encoding="utf-8"?>
+<file path=ppt/slides/slide24.xml><?xml version="1.0" encoding="utf-8"?>
 <p:sld xmlns:a="http://schemas.openxmlformats.org/drawingml/2006/main" xmlns:r="http://schemas.openxmlformats.org/officeDocument/2006/relationships" xmlns:p="http://schemas.openxmlformats.org/presentationml/2006/main">
   <p:cSld>
     <p:spTree>
@@ -6254,7 +6697,7 @@
           <p:cNvPr id="2" name="Заголовок 1">
             <a:extLst>
               <a:ext uri="{FF2B5EF4-FFF2-40B4-BE49-F238E27FC236}">
-                <a16:creationId xmlns:a16="http://schemas.microsoft.com/office/drawing/2014/main" id="{E643B799-D3D9-3E4E-9176-2CB79B29E1C1}"/>
+                <a16:creationId xmlns:a16="http://schemas.microsoft.com/office/drawing/2014/main" id="{FB5AD380-1180-B542-9C19-9FF2CB20C3A2}"/>
               </a:ext>
             </a:extLst>
           </p:cNvPr>
@@ -6272,7 +6715,7 @@
           <a:p>
             <a:r>
               <a:rPr lang="ru-RU" dirty="0"/>
-              <a:t>Результаты</a:t>
+              <a:t>Заключение</a:t>
             </a:r>
           </a:p>
         </p:txBody>
@@ -6282,7 +6725,7 @@
           <p:cNvPr id="3" name="Объект 2">
             <a:extLst>
               <a:ext uri="{FF2B5EF4-FFF2-40B4-BE49-F238E27FC236}">
-                <a16:creationId xmlns:a16="http://schemas.microsoft.com/office/drawing/2014/main" id="{41805C9E-A47B-9A48-BD4E-76139329D41D}"/>
+                <a16:creationId xmlns:a16="http://schemas.microsoft.com/office/drawing/2014/main" id="{FA0B0086-612F-3442-BC9C-6E167E67E463}"/>
               </a:ext>
             </a:extLst>
           </p:cNvPr>
@@ -6298,16 +6741,11 @@
           <a:bodyPr/>
           <a:lstStyle/>
           <a:p>
-            <a:pPr>
-              <a:spcBef>
-                <a:spcPts val="1200"/>
-              </a:spcBef>
-              <a:spcAft>
-                <a:spcPts val="1200"/>
-              </a:spcAft>
+            <a:pPr marL="0" indent="0">
+              <a:buNone/>
             </a:pPr>
             <a:r>
-              <a:rPr lang="ru-RU" sz="1800" b="1" dirty="0">
+              <a:rPr lang="ru-RU" sz="1800" dirty="0">
                 <a:solidFill>
                   <a:srgbClr val="0F1115"/>
                 </a:solidFill>
@@ -6315,8 +6753,10 @@
                 <a:latin typeface="quote-cjk-patch"/>
                 <a:ea typeface="Times New Roman" panose="02020603050405020304" pitchFamily="18" charset="0"/>
               </a:rPr>
-              <a:t>Длина пакета является значимым параметром управления производительностью</a:t>
-            </a:r>
+              <a:t>В ходе лабораторной работы было проведено исследование работы сегмента сети с протоколом доступа CSMA. Моделирование проводилось для различных значений интенсивности генерации пакетов и разного количества хостов. Были получены следующие основные результаты:</a:t>
+            </a:r>
+          </a:p>
+          <a:p>
             <a:r>
               <a:rPr lang="ru-RU" sz="1800" dirty="0">
                 <a:solidFill>
@@ -6325,20 +6765,51 @@
                 <a:effectLst/>
                 <a:latin typeface="quote-cjk-patch"/>
                 <a:ea typeface="Times New Roman" panose="02020603050405020304" pitchFamily="18" charset="0"/>
-              </a:rPr>
-              <a:t> CSMA-сегмента сети. Линейная зависимость занятости канала от длины пакета позволяет </a:t>
-            </a:r>
-            <a:r>
-              <a:rPr lang="ru-RU" sz="1800" b="1" dirty="0">
+                <a:cs typeface="Times New Roman" panose="02020603050405020304" pitchFamily="18" charset="0"/>
+              </a:rPr>
+              <a:t>Влияние интенсивности трафика на максимальное число хостов</a:t>
+            </a:r>
+            <a:r>
+              <a:rPr lang="ru-RU" dirty="0">
+                <a:effectLst/>
+              </a:rPr>
+              <a:t> </a:t>
+            </a:r>
+            <a:endParaRPr lang="ru-RU" dirty="0">
+              <a:solidFill>
+                <a:srgbClr val="0F1115"/>
+              </a:solidFill>
+              <a:latin typeface="quote-cjk-patch"/>
+            </a:endParaRPr>
+          </a:p>
+          <a:p>
+            <a:r>
+              <a:rPr lang="ru-RU" sz="1800" dirty="0">
                 <a:solidFill>
                   <a:srgbClr val="0F1115"/>
                 </a:solidFill>
                 <a:effectLst/>
                 <a:latin typeface="quote-cjk-patch"/>
                 <a:ea typeface="Times New Roman" panose="02020603050405020304" pitchFamily="18" charset="0"/>
-              </a:rPr>
-              <a:t>точно прогнозировать и регулировать нагрузку</a:t>
-            </a:r>
+                <a:cs typeface="Times New Roman" panose="02020603050405020304" pitchFamily="18" charset="0"/>
+              </a:rPr>
+              <a:t>Сравнение ограничений по занятости канала и стабильности очереди</a:t>
+            </a:r>
+            <a:r>
+              <a:rPr lang="ru-RU" dirty="0">
+                <a:effectLst/>
+              </a:rPr>
+              <a:t> </a:t>
+            </a:r>
+            <a:endParaRPr lang="ru-RU" dirty="0">
+              <a:solidFill>
+                <a:srgbClr val="0F1115"/>
+              </a:solidFill>
+              <a:effectLst/>
+              <a:latin typeface="quote-cjk-patch"/>
+            </a:endParaRPr>
+          </a:p>
+          <a:p>
             <a:r>
               <a:rPr lang="ru-RU" sz="1800" dirty="0">
                 <a:solidFill>
@@ -6347,8 +6818,41 @@
                 <a:effectLst/>
                 <a:latin typeface="quote-cjk-patch"/>
                 <a:ea typeface="Times New Roman" panose="02020603050405020304" pitchFamily="18" charset="0"/>
-              </a:rPr>
-              <a:t> на сеть.</a:t>
+                <a:cs typeface="Times New Roman" panose="02020603050405020304" pitchFamily="18" charset="0"/>
+              </a:rPr>
+              <a:t>Эффективность модели CSMA без коллизий</a:t>
+            </a:r>
+            <a:r>
+              <a:rPr lang="ru-RU" dirty="0">
+                <a:effectLst/>
+              </a:rPr>
+              <a:t> </a:t>
+            </a:r>
+            <a:endParaRPr lang="ru-RU" dirty="0">
+              <a:solidFill>
+                <a:srgbClr val="0F1115"/>
+              </a:solidFill>
+              <a:latin typeface="quote-cjk-patch"/>
+            </a:endParaRPr>
+          </a:p>
+          <a:p>
+            <a:r>
+              <a:rPr lang="ru-RU" sz="1800" dirty="0">
+                <a:solidFill>
+                  <a:srgbClr val="0F1115"/>
+                </a:solidFill>
+                <a:effectLst/>
+                <a:latin typeface="quote-cjk-patch"/>
+                <a:ea typeface="Times New Roman" panose="02020603050405020304" pitchFamily="18" charset="0"/>
+                <a:cs typeface="Times New Roman" panose="02020603050405020304" pitchFamily="18" charset="0"/>
+              </a:rPr>
+              <a:t>Влияние длины пакета на занятость канала</a:t>
+            </a:r>
+            <a:r>
+              <a:rPr lang="ru-RU" dirty="0">
+                <a:effectLst/>
+              </a:rPr>
+              <a:t> </a:t>
             </a:r>
             <a:endParaRPr lang="ru-RU" sz="1800" dirty="0">
               <a:effectLst/>
@@ -6357,54 +6861,6 @@
             </a:endParaRPr>
           </a:p>
           <a:p>
-            <a:pPr algn="l">
-              <a:spcBef>
-                <a:spcPts val="1200"/>
-              </a:spcBef>
-              <a:spcAft>
-                <a:spcPts val="1200"/>
-              </a:spcAft>
-            </a:pPr>
-            <a:r>
-              <a:rPr lang="ru-RU" sz="1800" dirty="0">
-                <a:solidFill>
-                  <a:srgbClr val="0F1115"/>
-                </a:solidFill>
-                <a:effectLst/>
-                <a:latin typeface="quote-cjk-patch"/>
-                <a:ea typeface="Times New Roman" panose="02020603050405020304" pitchFamily="18" charset="0"/>
-              </a:rPr>
-              <a:t>При проектировании и настройке сетей необходимо </a:t>
-            </a:r>
-            <a:r>
-              <a:rPr lang="ru-RU" sz="1800" b="1" dirty="0">
-                <a:solidFill>
-                  <a:srgbClr val="0F1115"/>
-                </a:solidFill>
-                <a:effectLst/>
-                <a:latin typeface="quote-cjk-patch"/>
-                <a:ea typeface="Times New Roman" panose="02020603050405020304" pitchFamily="18" charset="0"/>
-              </a:rPr>
-              <a:t>учитывать не только количество станций и интенсивность трафика, но и размер передаваемых пакетов</a:t>
-            </a:r>
-            <a:r>
-              <a:rPr lang="ru-RU" sz="1800" dirty="0">
-                <a:solidFill>
-                  <a:srgbClr val="0F1115"/>
-                </a:solidFill>
-                <a:effectLst/>
-                <a:latin typeface="quote-cjk-patch"/>
-                <a:ea typeface="Times New Roman" panose="02020603050405020304" pitchFamily="18" charset="0"/>
-              </a:rPr>
-              <a:t>. Оптимизация этого параметра может существенно улучшить эффективность использования сетевых ресурсов без изменения топологии или аппаратного обеспечения.</a:t>
-            </a:r>
-            <a:endParaRPr lang="ru-RU" sz="1800" dirty="0">
-              <a:effectLst/>
-              <a:latin typeface="Times New Roman" panose="02020603050405020304" pitchFamily="18" charset="0"/>
-              <a:ea typeface="Times New Roman" panose="02020603050405020304" pitchFamily="18" charset="0"/>
-            </a:endParaRPr>
-          </a:p>
-          <a:p>
             <a:endParaRPr lang="ru-RU" dirty="0"/>
           </a:p>
         </p:txBody>
@@ -6412,7 +6868,7 @@
     </p:spTree>
     <p:extLst>
       <p:ext uri="{BB962C8B-B14F-4D97-AF65-F5344CB8AC3E}">
-        <p14:creationId xmlns:p14="http://schemas.microsoft.com/office/powerpoint/2010/main" val="454295614"/>
+        <p14:creationId xmlns:p14="http://schemas.microsoft.com/office/powerpoint/2010/main" val="3939314272"/>
       </p:ext>
     </p:extLst>
   </p:cSld>
@@ -7686,25 +8142,30 @@
               <a:buChar char="•"/>
             </a:pPr>
             <a:r>
-              <a:rPr lang="ru-RU" b="1" i="0" dirty="0">
-                <a:solidFill>
-                  <a:srgbClr val="0F1115"/>
-                </a:solidFill>
-                <a:effectLst/>
-                <a:latin typeface="quote-cjk-patch"/>
-              </a:rPr>
-              <a:t>Проверка доступности канала</a:t>
-            </a:r>
-            <a:r>
-              <a:rPr lang="ru-RU" b="0" i="0" dirty="0">
-                <a:solidFill>
-                  <a:srgbClr val="0F1115"/>
-                </a:solidFill>
-                <a:effectLst/>
-                <a:latin typeface="quote-cjk-patch"/>
-              </a:rPr>
-              <a:t> при прибытии пакета</a:t>
-            </a:r>
+              <a:rPr lang="ru-RU" b="1" dirty="0">
+                <a:solidFill>
+                  <a:srgbClr val="0F1115"/>
+                </a:solidFill>
+                <a:latin typeface="quote-cjk-patch"/>
+              </a:rPr>
+              <a:t>Ожидание и проверка </a:t>
+            </a:r>
+            <a:r>
+              <a:rPr lang="ru-RU" dirty="0">
+                <a:solidFill>
+                  <a:srgbClr val="0F1115"/>
+                </a:solidFill>
+                <a:latin typeface="quote-cjk-patch"/>
+              </a:rPr>
+              <a:t>при прибытии пакета</a:t>
+            </a:r>
+            <a:endParaRPr lang="ru-RU" i="0" dirty="0">
+              <a:solidFill>
+                <a:srgbClr val="0F1115"/>
+              </a:solidFill>
+              <a:effectLst/>
+              <a:latin typeface="quote-cjk-patch"/>
+            </a:endParaRPr>
           </a:p>
           <a:p>
             <a:pPr marL="742950" lvl="1" indent="-285750" algn="l">
@@ -7741,35 +8202,6 @@
               <a:effectLst/>
               <a:latin typeface="quote-cjk-patch"/>
             </a:endParaRPr>
-          </a:p>
-          <a:p>
-            <a:pPr marL="742950" lvl="1" indent="-285750" algn="l">
-              <a:spcBef>
-                <a:spcPts val="400"/>
-              </a:spcBef>
-              <a:buFont typeface="Arial" panose="020B0604020202020204" pitchFamily="34" charset="0"/>
-              <a:buChar char="•"/>
-            </a:pPr>
-            <a:r>
-              <a:rPr lang="ru-RU" b="1" i="0" dirty="0">
-                <a:solidFill>
-                  <a:srgbClr val="0F1115"/>
-                </a:solidFill>
-                <a:effectLst/>
-                <a:latin typeface="quote-cjk-patch"/>
-              </a:rPr>
-              <a:t>Освобождение канала</a:t>
-            </a:r>
-            <a:r>
-              <a:rPr lang="ru-RU" b="0" i="0" dirty="0">
-                <a:solidFill>
-                  <a:srgbClr val="0F1115"/>
-                </a:solidFill>
-                <a:effectLst/>
-                <a:latin typeface="quote-cjk-patch"/>
-              </a:rPr>
-              <a:t> и выбор следующего передатчика</a:t>
-            </a:r>
           </a:p>
           <a:p>
             <a:pPr algn="l">
